--- a/BACKUP&RECOVERY/07장/07장_NOARCHIVELOG_복구_리두로그_복합장애.pptx
+++ b/BACKUP&RECOVERY/07장/07장_NOARCHIVELOG_복구_리두로그_복합장애.pptx
@@ -7019,7 +7019,7 @@
                 <a:latin typeface="Consolas"/>
                 <a:ea typeface="Consolas"/>
               </a:rPr>
-              <a:t>ORA-00312: online log 3 thread 1: '/u01/app/oracle/oradata/ORCL/redo03.log'</a:t>
+              <a:t>ORA-00312: online log 3 thread 1: '/u01/app/oracle/oradata/orcl/redo03.log'</a:t>
             </a:r>
           </a:p>
           <a:p>
@@ -7036,7 +7036,7 @@
                 <a:latin typeface="Consolas"/>
                 <a:ea typeface="Consolas"/>
               </a:rPr>
-              <a:t>ORA-00312: online log 3 thread 1: '/u02/oradata/ORCL/redo03b.log'</a:t>
+              <a:t>ORA-00312: online log 3 thread 1: '/u02/oradata/orcl/redo03b.log'</a:t>
             </a:r>
           </a:p>
           <a:p>
@@ -8674,7 +8674,7 @@
                 <a:latin typeface="Consolas"/>
                 <a:ea typeface="Consolas"/>
               </a:rPr>
-              <a:t>ORA-01110: data file 1: '/u01/app/oracle/oradata/ORCL/system01.dbf'</a:t>
+              <a:t>ORA-01110: data file 1: '/u01/app/oracle/oradata/orcl/system01.dbf'</a:t>
             </a:r>
           </a:p>
           <a:p>
@@ -10346,7 +10346,7 @@
                 <a:latin typeface="Consolas"/>
                 <a:ea typeface="Consolas"/>
               </a:rPr>
-              <a:t>ORA-00202: control file: '/u01/app/oracle/oradata/ORCL/control01.ctl'</a:t>
+              <a:t>ORA-00202: control file: '/u01/app/oracle/oradata/orcl/control01.ctl'</a:t>
             </a:r>
           </a:p>
           <a:p>
@@ -10380,7 +10380,7 @@
                 <a:latin typeface="Consolas"/>
                 <a:ea typeface="Consolas"/>
               </a:rPr>
-              <a:t>           '/u01/app/oracle/oradata/ORCL/redo01.log' - file cannot be created</a:t>
+              <a:t>           '/u01/app/oracle/oradata/orcl/redo01.log' - file cannot be created</a:t>
             </a:r>
           </a:p>
           <a:p>
@@ -11529,7 +11529,7 @@
                 <a:latin typeface="Consolas"/>
                 <a:ea typeface="Consolas"/>
               </a:rPr>
-              <a:t>  3  TO '/u01/app/oracle/oradata/ORCL/users02.dbf';</a:t>
+              <a:t>  3  TO '/u01/app/oracle/oradata/orcl/users02.dbf';</a:t>
             </a:r>
           </a:p>
           <a:p>
@@ -16033,7 +16033,7 @@
                 <a:latin typeface="Consolas"/>
                 <a:ea typeface="Consolas"/>
               </a:rPr>
-              <a:t>         1          8 CURRENT  /u01/app/oracle/oradata/ORCL/redo01.log</a:t>
+              <a:t>         1          8 CURRENT  /u01/app/oracle/oradata/orcl/redo01.log</a:t>
             </a:r>
           </a:p>
           <a:p>
@@ -16050,7 +16050,7 @@
                 <a:latin typeface="Consolas"/>
                 <a:ea typeface="Consolas"/>
               </a:rPr>
-              <a:t>         1          8 CURRENT  /u02/oradata/ORCL/redo01b.log</a:t>
+              <a:t>         1          8 CURRENT  /u02/oradata/orcl/redo01b.log</a:t>
             </a:r>
           </a:p>
           <a:p>
@@ -16067,7 +16067,7 @@
                 <a:latin typeface="Consolas"/>
                 <a:ea typeface="Consolas"/>
               </a:rPr>
-              <a:t>         3          6 INACTIVE /u01/app/oracle/oradata/ORCL/redo03.log</a:t>
+              <a:t>         3          6 INACTIVE /u01/app/oracle/oradata/orcl/redo03.log</a:t>
             </a:r>
           </a:p>
           <a:p>
@@ -16084,7 +16084,7 @@
                 <a:latin typeface="Consolas"/>
                 <a:ea typeface="Consolas"/>
               </a:rPr>
-              <a:t>         3          6 INACTIVE /u02/oradata/ORCL/redo03b.log</a:t>
+              <a:t>         3          6 INACTIVE /u02/oradata/orcl/redo03b.log</a:t>
             </a:r>
           </a:p>
           <a:p>
@@ -16101,7 +16101,7 @@
                 <a:latin typeface="Consolas"/>
                 <a:ea typeface="Consolas"/>
               </a:rPr>
-              <a:t>         4          7 INACTIVE /u01/app/oracle/oradata/ORCL/redo04.log</a:t>
+              <a:t>         4          7 INACTIVE /u01/app/oracle/oradata/orcl/redo04.log</a:t>
             </a:r>
           </a:p>
           <a:p>
@@ -16118,7 +16118,7 @@
                 <a:latin typeface="Consolas"/>
                 <a:ea typeface="Consolas"/>
               </a:rPr>
-              <a:t>         4          7 INACTIVE /u02/oradata/ORCL/redo04b.log</a:t>
+              <a:t>         4          7 INACTIVE /u02/oradata/orcl/redo04b.log</a:t>
             </a:r>
           </a:p>
         </p:txBody>
